--- a/curso/pptx/S88.pptx
+++ b/curso/pptx/S88.pptx
@@ -5623,7 +5623,7 @@
                 </a:solidFill>
                 <a:latin typeface="Nunito Sans"/>
               </a:rPr>
-              <a:t>Eliges tú, no el grupo ni la app （第52课）</a:t>
+              <a:t>是你自己选择的，而不是群体或应用程序替你选的（第52课）</a:t>
             </a:r>
           </a:p>
           <a:p>
@@ -5648,7 +5648,7 @@
                 </a:solidFill>
                 <a:latin typeface="Nunito Sans"/>
               </a:rPr>
-              <a:t>Es </a:t>
+              <a:t>它是</a:t>
             </a:r>
             <a:r>
               <a:rPr sz="2800" b="1">
@@ -5657,7 +5657,7 @@
                 </a:solidFill>
                 <a:latin typeface="Nunito Sans"/>
               </a:rPr>
-              <a:t>variado</a:t>
+              <a:t>多样的</a:t>
             </a:r>
             <a:r>
               <a:rPr sz="2800" b="0">
@@ -5666,7 +5666,7 @@
                 </a:solidFill>
                 <a:latin typeface="Nunito Sans"/>
               </a:rPr>
-              <a:t>: deporte, música, monte, leer, quedar con la cuadrilla</a:t>
+              <a:t>：运动、音乐、爬山、读书、和朋友圈见面</a:t>
             </a:r>
           </a:p>
           <a:p>
@@ -5691,7 +5691,7 @@
                 </a:solidFill>
                 <a:latin typeface="Nunito Sans"/>
               </a:rPr>
-              <a:t>No te quita el sueño, los estudios ni la salud</a:t>
+              <a:t>它不会夺走你的睡眠、学习或健康</a:t>
             </a:r>
           </a:p>
           <a:p>
@@ -5716,7 +5716,7 @@
                 </a:solidFill>
                 <a:latin typeface="Nunito Sans"/>
               </a:rPr>
-              <a:t>Puedes dejarlo cuando quieres: sigues teniendo el </a:t>
+              <a:t>你想放下时就能放下：你依然有</a:t>
             </a:r>
             <a:r>
               <a:rPr sz="2800" b="1">
@@ -5725,7 +5725,7 @@
                 </a:solidFill>
                 <a:latin typeface="Nunito Sans"/>
               </a:rPr>
-              <a:t>control</a:t>
+              <a:t>控制</a:t>
             </a:r>
           </a:p>
         </p:txBody>
@@ -7510,7 +7510,7 @@
                 </a:solidFill>
                 <a:latin typeface="Nunito Sans"/>
               </a:rPr>
-              <a:t>Una forma de verlo: tiene tres </a:t>
+              <a:t>一种看法：它有三个</a:t>
             </a:r>
             <a:r>
               <a:rPr sz="2800" b="1">
@@ -7519,7 +7519,7 @@
                 </a:solidFill>
                 <a:latin typeface="Nunito Sans"/>
               </a:rPr>
-              <a:t>elementos</a:t>
+              <a:t>要素</a:t>
             </a:r>
           </a:p>
           <a:p>
@@ -7544,7 +7544,7 @@
                 </a:solidFill>
                 <a:latin typeface="Nunito Sans"/>
               </a:rPr>
-              <a:t>Tiempo libre:</a:t>
+              <a:t>空闲时间：</a:t>
             </a:r>
             <a:r>
               <a:rPr sz="2800" b="0">
@@ -7553,7 +7553,7 @@
                 </a:solidFill>
                 <a:latin typeface="Nunito Sans"/>
               </a:rPr>
-              <a:t> fuera de clase, deberes y tareas</a:t>
+              <a:t>在上课、作业和任务之外</a:t>
             </a:r>
           </a:p>
           <a:p>
@@ -7578,7 +7578,7 @@
                 </a:solidFill>
                 <a:latin typeface="Nunito Sans"/>
               </a:rPr>
-              <a:t>Elección:</a:t>
+              <a:t>选择：</a:t>
             </a:r>
             <a:r>
               <a:rPr sz="2800" b="0">
@@ -7587,7 +7587,7 @@
                 </a:solidFill>
                 <a:latin typeface="Nunito Sans"/>
               </a:rPr>
-              <a:t> lo decides tú, nadie te obliga</a:t>
+              <a:t>你自己决定，没有人强迫你</a:t>
             </a:r>
           </a:p>
           <a:p>
@@ -7612,7 +7612,7 @@
                 </a:solidFill>
                 <a:latin typeface="Nunito Sans"/>
               </a:rPr>
-              <a:t>Disfrute:</a:t>
+              <a:t>享受：</a:t>
             </a:r>
             <a:r>
               <a:rPr sz="2800" b="0">
@@ -7621,7 +7621,7 @@
                 </a:solidFill>
                 <a:latin typeface="Nunito Sans"/>
               </a:rPr>
-              <a:t> te sienta bien, te divierte o te hace crecer</a:t>
+              <a:t>让你舒服、开心或让你成长</a:t>
             </a:r>
           </a:p>
         </p:txBody>
@@ -7855,7 +7855,7 @@
                 </a:solidFill>
                 <a:latin typeface="Nunito Sans"/>
               </a:rPr>
-              <a:t>Con sustancia:</a:t>
+              <a:t>有物质的：</a:t>
             </a:r>
             <a:r>
               <a:rPr sz="2800" b="0">
@@ -7864,7 +7864,7 @@
                 </a:solidFill>
                 <a:latin typeface="Nunito Sans"/>
               </a:rPr>
-              <a:t> alcohol, nicotina (tabaco y vapeo), cannabis…</a:t>
+              <a:t>酒精、尼古丁（烟草和电子烟）、大麻……</a:t>
             </a:r>
           </a:p>
           <a:p>
@@ -7889,7 +7889,7 @@
                 </a:solidFill>
                 <a:latin typeface="Nunito Sans"/>
               </a:rPr>
-              <a:t>Sin sustancia:</a:t>
+              <a:t>无物质的：</a:t>
             </a:r>
             <a:r>
               <a:rPr sz="2800" b="0">
@@ -7898,7 +7898,7 @@
                 </a:solidFill>
                 <a:latin typeface="Nunito Sans"/>
               </a:rPr>
-              <a:t> apuestas, videojuegos</a:t>
+              <a:t>赌博、电子游戏</a:t>
             </a:r>
           </a:p>
           <a:p>
@@ -7923,7 +7923,7 @@
                 </a:solidFill>
                 <a:latin typeface="Nunito Sans"/>
               </a:rPr>
-              <a:t>La OMS reconoce el trastorno por juego de apuestas y por videojuegos</a:t>
+              <a:t>世界卫生组织承认赌博障碍和游戏障碍</a:t>
             </a:r>
           </a:p>
           <a:p>
@@ -7948,7 +7948,7 @@
                 </a:solidFill>
                 <a:latin typeface="Nunito Sans"/>
               </a:rPr>
-              <a:t>«Adicción al móvil» no es un diagnóstico oficial: se dice «uso problemático»</a:t>
+              <a:t>“手机成瘾”不是正式的诊断：应该说“问题性使用”</a:t>
             </a:r>
           </a:p>
         </p:txBody>
@@ -8139,7 +8139,7 @@
                 </a:solidFill>
                 <a:latin typeface="Nunito Sans"/>
               </a:rPr>
-              <a:t>Pérdida de control:</a:t>
+              <a:t>失去控制：</a:t>
             </a:r>
             <a:r>
               <a:rPr sz="2800" b="0">
@@ -8148,7 +8148,7 @@
                 </a:solidFill>
                 <a:latin typeface="Nunito Sans"/>
               </a:rPr>
-              <a:t> quieres parar y no puedes</a:t>
+              <a:t>你想停下却停不了</a:t>
             </a:r>
           </a:p>
           <a:p>
@@ -8173,7 +8173,7 @@
                 </a:solidFill>
                 <a:latin typeface="Nunito Sans"/>
               </a:rPr>
-              <a:t>Seguir aunque haga daño:</a:t>
+              <a:t>明知有害仍继续：</a:t>
             </a:r>
             <a:r>
               <a:rPr sz="2800" b="0">
@@ -8182,7 +8182,7 @@
                 </a:solidFill>
                 <a:latin typeface="Nunito Sans"/>
               </a:rPr>
-              <a:t> al sueño, a los estudios, a la familia</a:t>
+              <a:t>影响睡眠、学习、家庭</a:t>
             </a:r>
           </a:p>
           <a:p>
@@ -8207,7 +8207,7 @@
                 </a:solidFill>
                 <a:latin typeface="Nunito Sans"/>
               </a:rPr>
-              <a:t>Tolerancia:</a:t>
+              <a:t>耐受性：</a:t>
             </a:r>
             <a:r>
               <a:rPr sz="2800" b="0">
@@ -8216,7 +8216,7 @@
                 </a:solidFill>
                 <a:latin typeface="Nunito Sans"/>
               </a:rPr>
-              <a:t> necesitas más para sentir lo mismo</a:t>
+              <a:t>需要更多才能得到同样的感觉</a:t>
             </a:r>
           </a:p>
           <a:p>
@@ -8241,7 +8241,7 @@
                 </a:solidFill>
                 <a:latin typeface="Nunito Sans"/>
               </a:rPr>
-              <a:t>Abstinencia:</a:t>
+              <a:t>戒断反应：</a:t>
             </a:r>
             <a:r>
               <a:rPr sz="2800" b="0">
@@ -8250,7 +8250,7 @@
                 </a:solidFill>
                 <a:latin typeface="Nunito Sans"/>
               </a:rPr>
-              <a:t> malestar, nervios o mal humor al dejarlo</a:t>
+              <a:t>停下来时不舒服、紧张或情绪不好</a:t>
             </a:r>
           </a:p>
           <a:p>
@@ -8275,7 +8275,7 @@
                 </a:solidFill>
                 <a:latin typeface="Nunito Sans"/>
               </a:rPr>
-              <a:t>Todo gira alrededor de eso y deja fuera lo demás</a:t>
+              <a:t>一切都围着它转，把其余的都排除在外</a:t>
             </a:r>
           </a:p>
         </p:txBody>

--- a/curso/pptx/S88.pptx
+++ b/curso/pptx/S88.pptx
@@ -4835,7 +4835,7 @@
                 </a:solidFill>
                 <a:latin typeface="Nunito Sans"/>
               </a:rPr>
-              <a:t>在 Aste Nagusia 期间，朋友圈里有人把一支电子烟递给 Iker：“来嘛，人人都这么做。”（虚构的例子。）</a:t>
+              <a:t>在 Aste Nagusia 期间，朋友圈里有人把一支电子烟递给一个男孩：“来嘛，人人都这么做。”（虚构的例子。）</a:t>
             </a:r>
           </a:p>
         </p:txBody>
@@ -5266,7 +5266,7 @@
                 </a:solidFill>
                 <a:latin typeface="Nunito Sans"/>
               </a:rPr>
-              <a:t>陈每个星期六和表兄弟们玩三个小时 Fortnite。他睡得好，学习，也和朋友圈见面。他的姨妈说：“他成瘾了。”（虚构的例子。）</a:t>
+              <a:t>一个男孩每个星期六和表兄弟们玩三个小时 Fortnite。他睡得好，学习，也和朋友圈见面。他的姨妈说：“他成瘾了。”（虚构的例子。）</a:t>
             </a:r>
           </a:p>
         </p:txBody>
@@ -5407,7 +5407,7 @@
                 </a:solidFill>
                 <a:latin typeface="Nunito Sans"/>
               </a:rPr>
-              <a:t>陈自己选择什么时候玩，而且没有耽误睡眠、学习和朋友圈。</a:t>
+              <a:t>这个男孩自己选择什么时候玩，而且没有耽误睡眠、学习和朋友圈。</a:t>
             </a:r>
           </a:p>
           <a:p>
